--- a/vacuum.pptx
+++ b/vacuum.pptx
@@ -216,7 +216,7 @@
           <a:p>
             <a:fld id="{AB81B2D2-06A2-4596-9391-656CA05E965F}" type="datetimeFigureOut">
               <a:rPr lang="et-EE" smtClean="0"/>
-              <a:t>18.09.2025</a:t>
+              <a:t>19.09.2025</a:t>
             </a:fld>
             <a:endParaRPr lang="et-EE"/>
           </a:p>
@@ -630,7 +630,7 @@
           <a:p>
             <a:fld id="{0E412FDE-1CFE-48F6-820F-9C443C301228}" type="datetime1">
               <a:rPr lang="et-EE" smtClean="0"/>
-              <a:t>18.09.2025</a:t>
+              <a:t>19.09.2025</a:t>
             </a:fld>
             <a:endParaRPr lang="et-EE" dirty="0"/>
           </a:p>
@@ -814,7 +814,7 @@
           <a:p>
             <a:fld id="{B64C0CFC-214E-42F4-8B82-CC6D451BD70F}" type="datetime1">
               <a:rPr lang="et-EE" smtClean="0"/>
-              <a:t>18.09.2025</a:t>
+              <a:t>19.09.2025</a:t>
             </a:fld>
             <a:endParaRPr lang="et-EE"/>
           </a:p>
@@ -997,7 +997,7 @@
           <a:p>
             <a:fld id="{5AB58BF1-41C1-47B8-ACAE-F9884B88C63A}" type="datetime1">
               <a:rPr lang="et-EE" smtClean="0"/>
-              <a:t>18.09.2025</a:t>
+              <a:t>19.09.2025</a:t>
             </a:fld>
             <a:endParaRPr lang="et-EE"/>
           </a:p>
@@ -1259,7 +1259,7 @@
           <a:p>
             <a:fld id="{E1CF8E31-244F-4A6A-A7D5-704B96C48AAE}" type="datetime1">
               <a:rPr lang="et-EE" smtClean="0"/>
-              <a:t>18.09.2025</a:t>
+              <a:t>19.09.2025</a:t>
             </a:fld>
             <a:endParaRPr lang="et-EE" dirty="0"/>
           </a:p>
@@ -1971,7 +1971,7 @@
           <a:p>
             <a:fld id="{CF92296B-3A94-4787-AA7D-8DC0AEE88FD4}" type="datetime1">
               <a:rPr lang="et-EE" smtClean="0"/>
-              <a:t>18.09.2025</a:t>
+              <a:t>19.09.2025</a:t>
             </a:fld>
             <a:endParaRPr lang="et-EE"/>
           </a:p>
@@ -2341,7 +2341,7 @@
           <a:p>
             <a:fld id="{185751C1-87AF-4EAC-9696-BB82432B7753}" type="datetime1">
               <a:rPr lang="et-EE" smtClean="0"/>
-              <a:t>18.09.2025</a:t>
+              <a:t>19.09.2025</a:t>
             </a:fld>
             <a:endParaRPr lang="et-EE"/>
           </a:p>
@@ -2439,7 +2439,7 @@
           <a:p>
             <a:fld id="{E493E3B0-4572-4FE0-8E55-6746BFAADA96}" type="datetime1">
               <a:rPr lang="et-EE" smtClean="0"/>
-              <a:t>18.09.2025</a:t>
+              <a:t>19.09.2025</a:t>
             </a:fld>
             <a:endParaRPr lang="et-EE"/>
           </a:p>
@@ -2584,7 +2584,7 @@
           <a:p>
             <a:fld id="{EE4C4D14-98D7-455C-9D0D-2863E0C0AA0D}" type="datetime1">
               <a:rPr lang="et-EE" smtClean="0"/>
-              <a:t>18.09.2025</a:t>
+              <a:t>19.09.2025</a:t>
             </a:fld>
             <a:endParaRPr lang="et-EE"/>
           </a:p>
@@ -2864,7 +2864,7 @@
           <a:p>
             <a:fld id="{94997DBE-8AE5-4A6F-9E25-F62C693D8ED5}" type="datetime1">
               <a:rPr lang="et-EE" smtClean="0"/>
-              <a:t>18.09.2025</a:t>
+              <a:t>19.09.2025</a:t>
             </a:fld>
             <a:endParaRPr lang="et-EE"/>
           </a:p>
@@ -3124,7 +3124,7 @@
           <a:p>
             <a:fld id="{DA3B51F9-97BE-4EFF-9934-D6DB8E40FF5E}" type="datetime1">
               <a:rPr lang="et-EE" smtClean="0"/>
-              <a:t>18.09.2025</a:t>
+              <a:t>19.09.2025</a:t>
             </a:fld>
             <a:endParaRPr lang="et-EE"/>
           </a:p>
@@ -3341,7 +3341,7 @@
           <a:p>
             <a:fld id="{E7C7EEDD-722C-4F14-9239-A37AD281B51F}" type="datetime1">
               <a:rPr lang="et-EE" smtClean="0"/>
-              <a:t>18.09.2025</a:t>
+              <a:t>19.09.2025</a:t>
             </a:fld>
             <a:endParaRPr lang="et-EE" dirty="0"/>
           </a:p>
@@ -3773,7 +3773,7 @@
         </p:blipFill>
         <p:spPr>
           <a:xfrm>
-            <a:off x="5373484" y="1270015"/>
+            <a:off x="5781163" y="1361994"/>
             <a:ext cx="6410837" cy="4631810"/>
           </a:xfrm>
           <a:prstGeom prst="rect">
@@ -3833,7 +3833,7 @@
           <a:p>
             <a:fld id="{E1CF8E31-244F-4A6A-A7D5-704B96C48AAE}" type="datetime1">
               <a:rPr lang="et-EE" smtClean="0"/>
-              <a:t>18.09.2025</a:t>
+              <a:t>19.09.2025</a:t>
             </a:fld>
             <a:endParaRPr lang="et-EE" dirty="0"/>
           </a:p>
@@ -4113,12 +4113,12 @@
         <p:spPr>
           <a:xfrm>
             <a:off x="224443" y="1161756"/>
-            <a:ext cx="5871558" cy="4365423"/>
+            <a:ext cx="6410836" cy="4365423"/>
           </a:xfrm>
         </p:spPr>
         <p:txBody>
           <a:bodyPr>
-            <a:normAutofit lnSpcReduction="10000"/>
+            <a:normAutofit/>
           </a:bodyPr>
           <a:lstStyle/>
           <a:p>
@@ -4127,7 +4127,7 @@
             </a:pPr>
             <a:r>
               <a:rPr lang="en-US" dirty="0"/>
-              <a:t>The tank is going to cost around 15k</a:t>
+              <a:t>The tank is going to cost around 15k (w/o tax)</a:t>
             </a:r>
           </a:p>
           <a:p>
@@ -4149,15 +4149,6 @@
             <a:r>
               <a:rPr lang="en-US" dirty="0"/>
               <a:t> seem to have similar offers.</a:t>
-            </a:r>
-          </a:p>
-          <a:p>
-            <a:pPr marL="0" indent="0">
-              <a:buNone/>
-            </a:pPr>
-            <a:r>
-              <a:rPr lang="en-US" dirty="0"/>
-              <a:t>	Together with the 4 viewports</a:t>
             </a:r>
           </a:p>
           <a:p>
@@ -4301,7 +4292,7 @@
           <a:p>
             <a:fld id="{E1CF8E31-244F-4A6A-A7D5-704B96C48AAE}" type="datetime1">
               <a:rPr lang="et-EE" smtClean="0"/>
-              <a:t>18.09.2025</a:t>
+              <a:t>19.09.2025</a:t>
             </a:fld>
             <a:endParaRPr lang="et-EE" dirty="0"/>
           </a:p>
@@ -4605,12 +4596,8 @@
               <a:buAutoNum type="arabicParenR"/>
             </a:pPr>
             <a:r>
-              <a:rPr lang="en-US" dirty="0" err="1"/>
-              <a:t>Leybold</a:t>
-            </a:r>
-            <a:r>
               <a:rPr lang="en-US" dirty="0"/>
-              <a:t> Turbo pump – 90 L/s</a:t>
+              <a:t>Leybold Turbo pump – 90 L/s</a:t>
             </a:r>
           </a:p>
           <a:p>
